--- a/exports/pptx/lessons/senior-module-01-what-is-iks/day-07-policy-debate.pptx
+++ b/exports/pptx/lessons/senior-module-01-what-is-iks/day-07-policy-debate.pptx
@@ -3201,6 +3201,208 @@
         </p:nvSpPr>
         <p:spPr>
           <a:xfrm>
+            <a:off x="406301" y="870942"/>
+            <a:ext cx="8498026" cy="213271"/>
+          </a:xfrm>
+          <a:prstGeom prst="rect">
+            <a:avLst/>
+          </a:prstGeom>
+          <a:noFill/>
+          <a:ln/>
+        </p:spPr>
+        <p:txBody>
+          <a:bodyPr wrap="square" lIns="0" tIns="0" rIns="0" bIns="0" rtlCol="0" anchor="t"/>
+          <a:lstStyle/>
+          <a:p>
+            <a:pPr algn="l" indent="0" marL="0">
+              <a:lnSpc>
+                <a:spcPts val="1680"/>
+              </a:lnSpc>
+              <a:spcBef>
+                <a:spcPts val="300"/>
+              </a:spcBef>
+              <a:spcAft>
+                <a:spcPts val="300"/>
+              </a:spcAft>
+              <a:buNone/>
+            </a:pPr>
+            <a:r>
+              <a:rPr lang="en-US" sz="1200" i="1" dirty="0">
+                <a:solidFill>
+                  <a:srgbClr val="1A1A1A"/>
+                </a:solidFill>
+                <a:latin typeface="Georgia" pitchFamily="34" charset="0"/>
+                <a:ea typeface="Georgia" pitchFamily="34" charset="-122"/>
+                <a:cs typeface="Georgia" pitchFamily="34" charset="-120"/>
+              </a:rPr>
+              <a:t>Each row: Position · One-line claim · Scholarly defender (typical).</a:t>
+            </a:r>
+            <a:endParaRPr lang="en-US" sz="1200" dirty="0"/>
+          </a:p>
+        </p:txBody>
+      </p:sp>
+      <p:sp>
+        <p:nvSpPr>
+          <p:cNvPr id="5" name="Text 3"/>
+          <p:cNvSpPr/>
+          <p:nvPr/>
+        </p:nvSpPr>
+        <p:spPr>
+          <a:xfrm>
+            <a:off x="634901" y="1173063"/>
+            <a:ext cx="8102798" cy="1386483"/>
+          </a:xfrm>
+          <a:prstGeom prst="rect">
+            <a:avLst/>
+          </a:prstGeom>
+          <a:noFill/>
+          <a:ln/>
+        </p:spPr>
+        <p:txBody>
+          <a:bodyPr wrap="square" lIns="0" tIns="0" rIns="0" bIns="0" rtlCol="0" anchor="t"/>
+          <a:lstStyle/>
+          <a:p>
+            <a:pPr algn="l" marL="342900" indent="-342900">
+              <a:lnSpc>
+                <a:spcPts val="1620"/>
+              </a:lnSpc>
+              <a:spcAft>
+                <a:spcPts val="300"/>
+              </a:spcAft>
+              <a:buSzPct val="100000"/>
+              <a:buChar char="•"/>
+            </a:pPr>
+            <a:r>
+              <a:rPr lang="en-US" sz="1200" b="1" dirty="0">
+                <a:solidFill>
+                  <a:srgbClr val="1A1A1A"/>
+                </a:solidFill>
+                <a:latin typeface="Georgia" pitchFamily="34" charset="0"/>
+                <a:ea typeface="Georgia" pitchFamily="34" charset="-122"/>
+                <a:cs typeface="Georgia" pitchFamily="34" charset="-120"/>
+              </a:rPr>
+              <a:t>A — Integration</a:t>
+            </a:r>
+            <a:pPr algn="l" indent="0" marL="0">
+              <a:lnSpc>
+                <a:spcPts val="1620"/>
+              </a:lnSpc>
+              <a:spcAft>
+                <a:spcPts val="300"/>
+              </a:spcAft>
+              <a:buNone/>
+            </a:pPr>
+            <a:r>
+              <a:rPr lang="en-US" sz="1200" dirty="0">
+                <a:solidFill>
+                  <a:srgbClr val="1A1A1A"/>
+                </a:solidFill>
+                <a:latin typeface="Georgia" pitchFamily="34" charset="0"/>
+                <a:ea typeface="Georgia" pitchFamily="34" charset="-122"/>
+                <a:cs typeface="Georgia" pitchFamily="34" charset="-120"/>
+              </a:rPr>
+              <a:t> — IKS should be taught alongside modern science in mainstream curriculum. · Kapil Kapoor; some NEP authors</a:t>
+            </a:r>
+            <a:endParaRPr lang="en-US" sz="1200" dirty="0"/>
+          </a:p>
+          <a:p>
+            <a:pPr algn="l" marL="342900" indent="-342900">
+              <a:lnSpc>
+                <a:spcPts val="1620"/>
+              </a:lnSpc>
+              <a:spcAft>
+                <a:spcPts val="300"/>
+              </a:spcAft>
+              <a:buSzPct val="100000"/>
+              <a:buChar char="•"/>
+            </a:pPr>
+            <a:r>
+              <a:rPr lang="en-US" sz="1200" b="1" dirty="0">
+                <a:solidFill>
+                  <a:srgbClr val="1A1A1A"/>
+                </a:solidFill>
+                <a:latin typeface="Georgia" pitchFamily="34" charset="0"/>
+                <a:ea typeface="Georgia" pitchFamily="34" charset="-122"/>
+                <a:cs typeface="Georgia" pitchFamily="34" charset="-120"/>
+              </a:rPr>
+              <a:t>B — Separation</a:t>
+            </a:r>
+            <a:pPr algn="l" indent="0" marL="0">
+              <a:lnSpc>
+                <a:spcPts val="1620"/>
+              </a:lnSpc>
+              <a:spcAft>
+                <a:spcPts val="300"/>
+              </a:spcAft>
+              <a:buNone/>
+            </a:pPr>
+            <a:r>
+              <a:rPr lang="en-US" sz="1200" dirty="0">
+                <a:solidFill>
+                  <a:srgbClr val="1A1A1A"/>
+                </a:solidFill>
+                <a:latin typeface="Georgia" pitchFamily="34" charset="0"/>
+                <a:ea typeface="Georgia" pitchFamily="34" charset="-122"/>
+                <a:cs typeface="Georgia" pitchFamily="34" charset="-120"/>
+              </a:rPr>
+              <a:t> — IKS belongs in humanities/history class; modern science class should focus on the scientific method. · Romila Thapar; Ramachandra Guha (broadly)</a:t>
+            </a:r>
+            <a:endParaRPr lang="en-US" sz="1200" dirty="0"/>
+          </a:p>
+          <a:p>
+            <a:pPr algn="l" marL="342900" indent="-342900">
+              <a:lnSpc>
+                <a:spcPts val="1620"/>
+              </a:lnSpc>
+              <a:spcAft>
+                <a:spcPts val="300"/>
+              </a:spcAft>
+              <a:buSzPct val="100000"/>
+              <a:buChar char="•"/>
+            </a:pPr>
+            <a:r>
+              <a:rPr lang="en-US" sz="1200" b="1" dirty="0">
+                <a:solidFill>
+                  <a:srgbClr val="1A1A1A"/>
+                </a:solidFill>
+                <a:latin typeface="Georgia" pitchFamily="34" charset="0"/>
+                <a:ea typeface="Georgia" pitchFamily="34" charset="-122"/>
+                <a:cs typeface="Georgia" pitchFamily="34" charset="-120"/>
+              </a:rPr>
+              <a:t>C — Qualified integration</a:t>
+            </a:r>
+            <a:pPr algn="l" indent="0" marL="0">
+              <a:lnSpc>
+                <a:spcPts val="1620"/>
+              </a:lnSpc>
+              <a:spcAft>
+                <a:spcPts val="300"/>
+              </a:spcAft>
+              <a:buNone/>
+            </a:pPr>
+            <a:r>
+              <a:rPr lang="en-US" sz="1200" dirty="0">
+                <a:solidFill>
+                  <a:srgbClr val="1A1A1A"/>
+                </a:solidFill>
+                <a:latin typeface="Georgia" pitchFamily="34" charset="0"/>
+                <a:ea typeface="Georgia" pitchFamily="34" charset="-122"/>
+                <a:cs typeface="Georgia" pitchFamily="34" charset="-120"/>
+              </a:rPr>
+              <a:t> — Historical context yes; equivalent scientific validity no. · Manjul Bhargava–style "math is universal"</a:t>
+            </a:r>
+            <a:endParaRPr lang="en-US" sz="1200" dirty="0"/>
+          </a:p>
+        </p:txBody>
+      </p:sp>
+      <p:sp>
+        <p:nvSpPr>
+          <p:cNvPr id="6" name="Text 4"/>
+          <p:cNvSpPr/>
+          <p:nvPr/>
+        </p:nvSpPr>
+        <p:spPr>
+          <a:xfrm>
             <a:off x="406301" y="4434929"/>
             <a:ext cx="8498026" cy="213271"/>
           </a:xfrm>

--- a/exports/pptx/lessons/senior-module-01-what-is-iks/day-07-policy-debate.pptx
+++ b/exports/pptx/lessons/senior-module-01-what-is-iks/day-07-policy-debate.pptx
@@ -16,9 +16,11 @@
     <p:sldId id="264" r:id="rId10"/>
     <p:sldId id="265" r:id="rId11"/>
     <p:sldId id="266" r:id="rId12"/>
+    <p:sldId id="267" r:id="rId13"/>
+    <p:sldId id="268" r:id="rId14"/>
   </p:sldIdLst>
   <p:notesMasterIdLst>
-    <p:notesMasterId r:id="rId13"/>
+    <p:notesMasterId r:id="rId15"/>
   </p:notesMasterIdLst>
   <p:sldSz cx="9144000" cy="5143500"/>
   <p:notesSz cx="5143500" cy="9144000"/>
@@ -712,6 +714,182 @@
             <a:fld id="{F7021451-1387-4CA6-816F-3879F97B5CBC}" type="slidenum">
               <a:rPr lang="en-US"/>
               <a:t>11</a:t>
+            </a:fld>
+            <a:endParaRPr lang="en-US"/>
+          </a:p>
+        </p:txBody>
+      </p:sp>
+    </p:spTree>
+    <p:extLst>
+      <p:ext uri="{BB962C8B-B14F-4D97-AF65-F5344CB8AC3E}">
+        <p14:creationId xmlns:p14="http://schemas.microsoft.com/office/powerpoint/2010/main" val="1024086991"/>
+      </p:ext>
+    </p:extLst>
+  </p:cSld>
+  <p:clrMapOvr>
+    <a:masterClrMapping/>
+  </p:clrMapOvr>
+</p:notes>
+</file>
+
+<file path=ppt/notesSlides/notesSlide12.xml><?xml version="1.0" encoding="utf-8"?>
+<p:notes xmlns:a="http://schemas.openxmlformats.org/drawingml/2006/main" xmlns:r="http://schemas.openxmlformats.org/officeDocument/2006/relationships" xmlns:p="http://schemas.openxmlformats.org/presentationml/2006/main">
+  <p:cSld>
+    <p:spTree>
+      <p:nvGrpSpPr>
+        <p:cNvPr id="1" name=""/>
+        <p:cNvGrpSpPr/>
+        <p:nvPr/>
+      </p:nvGrpSpPr>
+      <p:grpSpPr>
+        <a:xfrm>
+          <a:off x="0" y="0"/>
+          <a:ext cx="0" cy="0"/>
+          <a:chOff x="0" y="0"/>
+          <a:chExt cx="0" cy="0"/>
+        </a:xfrm>
+      </p:grpSpPr>
+      <p:sp>
+        <p:nvSpPr>
+          <p:cNvPr id="2" name="Slide Image Placeholder 1"/>
+          <p:cNvSpPr>
+            <a:spLocks noGrp="1" noRot="1" noChangeAspect="1"/>
+          </p:cNvSpPr>
+          <p:nvPr>
+            <p:ph type="sldImg"/>
+          </p:nvPr>
+        </p:nvSpPr>
+        <p:spPr/>
+      </p:sp>
+      <p:sp>
+        <p:nvSpPr>
+          <p:cNvPr id="3" name="Notes Placeholder 2"/>
+          <p:cNvSpPr>
+            <a:spLocks noGrp="1"/>
+          </p:cNvSpPr>
+          <p:nvPr>
+            <p:ph type="body" idx="1"/>
+          </p:nvPr>
+        </p:nvSpPr>
+        <p:spPr/>
+        <p:txBody>
+          <a:bodyPr/>
+          <a:lstStyle/>
+          <a:p>
+            <a:r>
+              <a:rPr lang="en-US" dirty="0"/>
+              <a:t/>
+            </a:r>
+            <a:endParaRPr lang="en-US" dirty="0"/>
+          </a:p>
+        </p:txBody>
+      </p:sp>
+      <p:sp>
+        <p:nvSpPr>
+          <p:cNvPr id="4" name="Slide Number Placeholder 3"/>
+          <p:cNvSpPr>
+            <a:spLocks noGrp="1"/>
+          </p:cNvSpPr>
+          <p:nvPr>
+            <p:ph type="sldNum" sz="quarter" idx="10"/>
+          </p:nvPr>
+        </p:nvSpPr>
+        <p:spPr/>
+        <p:txBody>
+          <a:bodyPr/>
+          <a:lstStyle/>
+          <a:p>
+            <a:fld id="{F7021451-1387-4CA6-816F-3879F97B5CBC}" type="slidenum">
+              <a:rPr lang="en-US"/>
+              <a:t>12</a:t>
+            </a:fld>
+            <a:endParaRPr lang="en-US"/>
+          </a:p>
+        </p:txBody>
+      </p:sp>
+    </p:spTree>
+    <p:extLst>
+      <p:ext uri="{BB962C8B-B14F-4D97-AF65-F5344CB8AC3E}">
+        <p14:creationId xmlns:p14="http://schemas.microsoft.com/office/powerpoint/2010/main" val="1024086991"/>
+      </p:ext>
+    </p:extLst>
+  </p:cSld>
+  <p:clrMapOvr>
+    <a:masterClrMapping/>
+  </p:clrMapOvr>
+</p:notes>
+</file>
+
+<file path=ppt/notesSlides/notesSlide13.xml><?xml version="1.0" encoding="utf-8"?>
+<p:notes xmlns:a="http://schemas.openxmlformats.org/drawingml/2006/main" xmlns:r="http://schemas.openxmlformats.org/officeDocument/2006/relationships" xmlns:p="http://schemas.openxmlformats.org/presentationml/2006/main">
+  <p:cSld>
+    <p:spTree>
+      <p:nvGrpSpPr>
+        <p:cNvPr id="1" name=""/>
+        <p:cNvGrpSpPr/>
+        <p:nvPr/>
+      </p:nvGrpSpPr>
+      <p:grpSpPr>
+        <a:xfrm>
+          <a:off x="0" y="0"/>
+          <a:ext cx="0" cy="0"/>
+          <a:chOff x="0" y="0"/>
+          <a:chExt cx="0" cy="0"/>
+        </a:xfrm>
+      </p:grpSpPr>
+      <p:sp>
+        <p:nvSpPr>
+          <p:cNvPr id="2" name="Slide Image Placeholder 1"/>
+          <p:cNvSpPr>
+            <a:spLocks noGrp="1" noRot="1" noChangeAspect="1"/>
+          </p:cNvSpPr>
+          <p:nvPr>
+            <p:ph type="sldImg"/>
+          </p:nvPr>
+        </p:nvSpPr>
+        <p:spPr/>
+      </p:sp>
+      <p:sp>
+        <p:nvSpPr>
+          <p:cNvPr id="3" name="Notes Placeholder 2"/>
+          <p:cNvSpPr>
+            <a:spLocks noGrp="1"/>
+          </p:cNvSpPr>
+          <p:nvPr>
+            <p:ph type="body" idx="1"/>
+          </p:nvPr>
+        </p:nvSpPr>
+        <p:spPr/>
+        <p:txBody>
+          <a:bodyPr/>
+          <a:lstStyle/>
+          <a:p>
+            <a:r>
+              <a:rPr lang="en-US" dirty="0"/>
+              <a:t/>
+            </a:r>
+            <a:endParaRPr lang="en-US" dirty="0"/>
+          </a:p>
+        </p:txBody>
+      </p:sp>
+      <p:sp>
+        <p:nvSpPr>
+          <p:cNvPr id="4" name="Slide Number Placeholder 3"/>
+          <p:cNvSpPr>
+            <a:spLocks noGrp="1"/>
+          </p:cNvSpPr>
+          <p:nvPr>
+            <p:ph type="sldNum" sz="quarter" idx="10"/>
+          </p:nvPr>
+        </p:nvSpPr>
+        <p:spPr/>
+        <p:txBody>
+          <a:bodyPr/>
+          <a:lstStyle/>
+          <a:p>
+            <a:fld id="{F7021451-1387-4CA6-816F-3879F97B5CBC}" type="slidenum">
+              <a:rPr lang="en-US"/>
+              <a:t>13</a:t>
             </a:fld>
             <a:endParaRPr lang="en-US"/>
           </a:p>
@@ -1965,102 +2143,6 @@
         </p:nvSpPr>
         <p:spPr>
           <a:xfrm>
-            <a:off x="406301" y="1574453"/>
-            <a:ext cx="8498026" cy="274290"/>
-          </a:xfrm>
-          <a:prstGeom prst="rect">
-            <a:avLst/>
-          </a:prstGeom>
-          <a:noFill/>
-          <a:ln/>
-        </p:spPr>
-        <p:txBody>
-          <a:bodyPr wrap="square" lIns="0" tIns="0" rIns="0" bIns="0" rtlCol="0" anchor="t"/>
-          <a:lstStyle/>
-          <a:p>
-            <a:pPr algn="l" indent="0" marL="0">
-              <a:lnSpc>
-                <a:spcPts val="2160"/>
-              </a:lnSpc>
-              <a:spcBef>
-                <a:spcPts val="600"/>
-              </a:spcBef>
-              <a:spcAft>
-                <a:spcPts val="800"/>
-              </a:spcAft>
-              <a:buNone/>
-            </a:pPr>
-            <a:r>
-              <a:rPr lang="en-US" sz="1800" b="1" dirty="0">
-                <a:solidFill>
-                  <a:srgbClr val="997929"/>
-                </a:solidFill>
-                <a:latin typeface="Times New Roman" pitchFamily="34" charset="0"/>
-                <a:ea typeface="Times New Roman" pitchFamily="34" charset="-122"/>
-                <a:cs typeface="Times New Roman" pitchFamily="34" charset="-120"/>
-              </a:rPr>
-              <a:t>Learning objective</a:t>
-            </a:r>
-            <a:endParaRPr lang="en-US" sz="1800" dirty="0"/>
-          </a:p>
-        </p:txBody>
-      </p:sp>
-      <p:sp>
-        <p:nvSpPr>
-          <p:cNvPr id="6" name="Text 4"/>
-          <p:cNvSpPr/>
-          <p:nvPr/>
-        </p:nvSpPr>
-        <p:spPr>
-          <a:xfrm>
-            <a:off x="406301" y="1988344"/>
-            <a:ext cx="8498026" cy="213271"/>
-          </a:xfrm>
-          <a:prstGeom prst="rect">
-            <a:avLst/>
-          </a:prstGeom>
-          <a:noFill/>
-          <a:ln/>
-        </p:spPr>
-        <p:txBody>
-          <a:bodyPr wrap="square" lIns="0" tIns="0" rIns="0" bIns="0" rtlCol="0" anchor="t"/>
-          <a:lstStyle/>
-          <a:p>
-            <a:pPr algn="l" indent="0" marL="0">
-              <a:lnSpc>
-                <a:spcPts val="1680"/>
-              </a:lnSpc>
-              <a:spcBef>
-                <a:spcPts val="300"/>
-              </a:spcBef>
-              <a:spcAft>
-                <a:spcPts val="300"/>
-              </a:spcAft>
-              <a:buNone/>
-            </a:pPr>
-            <a:r>
-              <a:rPr lang="en-US" sz="1200" dirty="0">
-                <a:solidFill>
-                  <a:srgbClr val="1A1A1A"/>
-                </a:solidFill>
-                <a:latin typeface="Georgia" pitchFamily="34" charset="0"/>
-                <a:ea typeface="Georgia" pitchFamily="34" charset="-122"/>
-                <a:cs typeface="Georgia" pitchFamily="34" charset="-120"/>
-              </a:rPr>
-              <a:t>Students articulate and defend a position on NEP 2020 §4.6 (IKS integration) with citation and counter-argument.</a:t>
-            </a:r>
-            <a:endParaRPr lang="en-US" sz="1200" dirty="0"/>
-          </a:p>
-        </p:txBody>
-      </p:sp>
-      <p:sp>
-        <p:nvSpPr>
-          <p:cNvPr id="7" name="Text 5"/>
-          <p:cNvSpPr/>
-          <p:nvPr/>
-        </p:nvSpPr>
-        <p:spPr>
-          <a:xfrm>
             <a:off x="406301" y="4434929"/>
             <a:ext cx="8498026" cy="213271"/>
           </a:xfrm>
@@ -2205,7 +2287,7 @@
                 <a:ea typeface="Times New Roman" pitchFamily="34" charset="-122"/>
                 <a:cs typeface="Times New Roman" pitchFamily="34" charset="-120"/>
               </a:rPr>
-              <a:t>Teacher notes</a:t>
+              <a:t>Wrap-up (12 min)</a:t>
             </a:r>
             <a:endParaRPr lang="en-US" sz="1800" dirty="0"/>
           </a:p>
@@ -2219,8 +2301,8 @@
         </p:nvSpPr>
         <p:spPr>
           <a:xfrm>
-            <a:off x="406301" y="870942"/>
-            <a:ext cx="8498026" cy="426541"/>
+            <a:off x="634901" y="883593"/>
+            <a:ext cx="8102798" cy="731341"/>
           </a:xfrm>
           <a:prstGeom prst="rect">
             <a:avLst/>
@@ -2232,17 +2314,15 @@
           <a:bodyPr wrap="square" lIns="0" tIns="0" rIns="0" bIns="0" rtlCol="0" anchor="t"/>
           <a:lstStyle/>
           <a:p>
-            <a:pPr algn="l" indent="0" marL="0">
-              <a:lnSpc>
-                <a:spcPts val="1680"/>
-              </a:lnSpc>
-              <a:spcBef>
-                <a:spcPts val="300"/>
-              </a:spcBef>
-              <a:spcAft>
-                <a:spcPts val="300"/>
-              </a:spcAft>
-              <a:buNone/>
+            <a:pPr algn="l" marL="342900" indent="-342900">
+              <a:lnSpc>
+                <a:spcPts val="1620"/>
+              </a:lnSpc>
+              <a:spcAft>
+                <a:spcPts val="300"/>
+              </a:spcAft>
+              <a:buSzPct val="100000"/>
+              <a:buChar char="•"/>
             </a:pPr>
             <a:r>
               <a:rPr lang="en-US" sz="1200" dirty="0">
@@ -2253,7 +2333,31 @@
                 <a:ea typeface="Georgia" pitchFamily="34" charset="-122"/>
                 <a:cs typeface="Georgia" pitchFamily="34" charset="-120"/>
               </a:rPr>
-              <a:t>– This is the most politically charged session. Honour the discomfort. – The honest framing: each position has a strongest version. The skill is articulating all three.</a:t>
+              <a:t>3 students share if their view shifted.</a:t>
+            </a:r>
+            <a:endParaRPr lang="en-US" sz="1200" dirty="0"/>
+          </a:p>
+          <a:p>
+            <a:pPr algn="l" marL="342900" indent="-342900">
+              <a:lnSpc>
+                <a:spcPts val="1620"/>
+              </a:lnSpc>
+              <a:spcAft>
+                <a:spcPts val="300"/>
+              </a:spcAft>
+              <a:buSzPct val="100000"/>
+              <a:buChar char="•"/>
+            </a:pPr>
+            <a:r>
+              <a:rPr lang="en-US" sz="1200" i="1" dirty="0">
+                <a:solidFill>
+                  <a:srgbClr val="1A1A1A"/>
+                </a:solidFill>
+                <a:latin typeface="Georgia" pitchFamily="34" charset="0"/>
+                <a:ea typeface="Georgia" pitchFamily="34" charset="-122"/>
+                <a:cs typeface="Georgia" pitchFamily="34" charset="-120"/>
+              </a:rPr>
+              <a:t>"You don't have to commit tonight. Your paper position can be different from your debate position. That's intellectually honest."</a:t>
             </a:r>
             <a:endParaRPr lang="en-US" sz="1200" dirty="0"/>
           </a:p>
@@ -2411,7 +2515,7 @@
                 <a:ea typeface="Times New Roman" pitchFamily="34" charset="-122"/>
                 <a:cs typeface="Times New Roman" pitchFamily="34" charset="-120"/>
               </a:rPr>
-              <a:t>Citation(s) used</a:t>
+              <a:t>Differentiation</a:t>
             </a:r>
             <a:endParaRPr lang="en-US" sz="1800" dirty="0"/>
           </a:p>
@@ -2425,8 +2529,8 @@
         </p:nvSpPr>
         <p:spPr>
           <a:xfrm>
-            <a:off x="406301" y="870942"/>
-            <a:ext cx="8498026" cy="213271"/>
+            <a:off x="634901" y="883593"/>
+            <a:ext cx="8102798" cy="525661"/>
           </a:xfrm>
           <a:prstGeom prst="rect">
             <a:avLst/>
@@ -2438,20 +2542,18 @@
           <a:bodyPr wrap="square" lIns="0" tIns="0" rIns="0" bIns="0" rtlCol="0" anchor="t"/>
           <a:lstStyle/>
           <a:p>
-            <a:pPr algn="l" indent="0" marL="0">
-              <a:lnSpc>
-                <a:spcPts val="1680"/>
-              </a:lnSpc>
-              <a:spcBef>
-                <a:spcPts val="300"/>
-              </a:spcBef>
-              <a:spcAft>
-                <a:spcPts val="300"/>
-              </a:spcAft>
-              <a:buNone/>
-            </a:pPr>
-            <a:r>
-              <a:rPr lang="en-US" sz="1200" dirty="0">
+            <a:pPr algn="l" marL="342900" indent="-342900">
+              <a:lnSpc>
+                <a:spcPts val="1620"/>
+              </a:lnSpc>
+              <a:spcAft>
+                <a:spcPts val="300"/>
+              </a:spcAft>
+              <a:buSzPct val="100000"/>
+              <a:buChar char="•"/>
+            </a:pPr>
+            <a:r>
+              <a:rPr lang="en-US" sz="1200" b="1" dirty="0">
                 <a:solidFill>
                   <a:srgbClr val="1A1A1A"/>
                 </a:solidFill>
@@ -2459,7 +2561,551 @@
                 <a:ea typeface="Georgia" pitchFamily="34" charset="-122"/>
                 <a:cs typeface="Georgia" pitchFamily="34" charset="-120"/>
               </a:rPr>
-              <a:t>– NEP 2020 §4.6. – Thapar (2014). – Various Kapil Kapoor writings.</a:t>
+              <a:t>Tier up:</a:t>
+            </a:r>
+            <a:pPr algn="l" indent="0" marL="0">
+              <a:lnSpc>
+                <a:spcPts val="1620"/>
+              </a:lnSpc>
+              <a:spcAft>
+                <a:spcPts val="300"/>
+              </a:spcAft>
+              <a:buNone/>
+            </a:pPr>
+            <a:r>
+              <a:rPr lang="en-US" sz="1200" dirty="0">
+                <a:solidFill>
+                  <a:srgbClr val="1A1A1A"/>
+                </a:solidFill>
+                <a:latin typeface="Georgia" pitchFamily="34" charset="0"/>
+                <a:ea typeface="Georgia" pitchFamily="34" charset="-122"/>
+                <a:cs typeface="Georgia" pitchFamily="34" charset="-120"/>
+              </a:rPr>
+              <a:t> Take a position you DON'T hold. Hardest form of argument.</a:t>
+            </a:r>
+            <a:endParaRPr lang="en-US" sz="1200" dirty="0"/>
+          </a:p>
+          <a:p>
+            <a:pPr algn="l" marL="342900" indent="-342900">
+              <a:lnSpc>
+                <a:spcPts val="1620"/>
+              </a:lnSpc>
+              <a:spcAft>
+                <a:spcPts val="300"/>
+              </a:spcAft>
+              <a:buSzPct val="100000"/>
+              <a:buChar char="•"/>
+            </a:pPr>
+            <a:r>
+              <a:rPr lang="en-US" sz="1200" b="1" dirty="0">
+                <a:solidFill>
+                  <a:srgbClr val="1A1A1A"/>
+                </a:solidFill>
+                <a:latin typeface="Georgia" pitchFamily="34" charset="0"/>
+                <a:ea typeface="Georgia" pitchFamily="34" charset="-122"/>
+                <a:cs typeface="Georgia" pitchFamily="34" charset="-120"/>
+              </a:rPr>
+              <a:t>Tier down:</a:t>
+            </a:r>
+            <a:pPr algn="l" indent="0" marL="0">
+              <a:lnSpc>
+                <a:spcPts val="1620"/>
+              </a:lnSpc>
+              <a:spcAft>
+                <a:spcPts val="300"/>
+              </a:spcAft>
+              <a:buNone/>
+            </a:pPr>
+            <a:r>
+              <a:rPr lang="en-US" sz="1200" dirty="0">
+                <a:solidFill>
+                  <a:srgbClr val="1A1A1A"/>
+                </a:solidFill>
+                <a:latin typeface="Georgia" pitchFamily="34" charset="0"/>
+                <a:ea typeface="Georgia" pitchFamily="34" charset="-122"/>
+                <a:cs typeface="Georgia" pitchFamily="34" charset="-120"/>
+              </a:rPr>
+              <a:t> Use Day 5 reading response as your script.</a:t>
+            </a:r>
+            <a:endParaRPr lang="en-US" sz="1200" dirty="0"/>
+          </a:p>
+        </p:txBody>
+      </p:sp>
+      <p:sp>
+        <p:nvSpPr>
+          <p:cNvPr id="5" name="Text 3"/>
+          <p:cNvSpPr/>
+          <p:nvPr/>
+        </p:nvSpPr>
+        <p:spPr>
+          <a:xfrm>
+            <a:off x="406301" y="4434929"/>
+            <a:ext cx="8498026" cy="213271"/>
+          </a:xfrm>
+          <a:prstGeom prst="rect">
+            <a:avLst/>
+          </a:prstGeom>
+          <a:noFill/>
+          <a:ln/>
+        </p:spPr>
+        <p:txBody>
+          <a:bodyPr wrap="square" lIns="0" tIns="0" rIns="0" bIns="0" rtlCol="0" anchor="t"/>
+          <a:lstStyle/>
+          <a:p>
+            <a:pPr algn="l" indent="0" marL="0">
+              <a:lnSpc>
+                <a:spcPts val="1680"/>
+              </a:lnSpc>
+              <a:spcBef>
+                <a:spcPts val="300"/>
+              </a:spcBef>
+              <a:spcAft>
+                <a:spcPts val="300"/>
+              </a:spcAft>
+              <a:buNone/>
+            </a:pPr>
+            <a:r>
+              <a:rPr lang="en-US" sz="1200" dirty="0">
+                <a:solidFill>
+                  <a:srgbClr val="1A1A1A"/>
+                </a:solidFill>
+                <a:latin typeface="Georgia" pitchFamily="34" charset="0"/>
+                <a:ea typeface="Georgia" pitchFamily="34" charset="-122"/>
+                <a:cs typeface="Georgia" pitchFamily="34" charset="-120"/>
+              </a:rPr>
+              <a:t>Senior ·  · IKS Curriculum</a:t>
+            </a:r>
+            <a:endParaRPr lang="en-US" sz="1200" dirty="0"/>
+          </a:p>
+        </p:txBody>
+      </p:sp>
+    </p:spTree>
+  </p:cSld>
+  <p:clrMapOvr>
+    <a:masterClrMapping/>
+  </p:clrMapOvr>
+</p:sld>
+</file>
+
+<file path=ppt/slides/slide12.xml><?xml version="1.0" encoding="utf-8"?>
+<p:sld xmlns:a="http://schemas.openxmlformats.org/drawingml/2006/main" xmlns:r="http://schemas.openxmlformats.org/officeDocument/2006/relationships" xmlns:p="http://schemas.openxmlformats.org/presentationml/2006/main">
+  <p:cSld name="Slide 12">
+    <p:bg>
+      <p:bgPr>
+        <a:solidFill>
+          <a:srgbClr val="FAF7F2"/>
+        </a:solidFill>
+      </p:bgPr>
+    </p:bg>
+    <p:spTree>
+      <p:nvGrpSpPr>
+        <p:cNvPr id="1" name=""/>
+        <p:cNvGrpSpPr/>
+        <p:nvPr/>
+      </p:nvGrpSpPr>
+      <p:grpSpPr>
+        <a:xfrm>
+          <a:off x="0" y="0"/>
+          <a:ext cx="0" cy="0"/>
+          <a:chOff x="0" y="0"/>
+          <a:chExt cx="0" cy="0"/>
+        </a:xfrm>
+      </p:grpSpPr>
+      <p:sp>
+        <p:nvSpPr>
+          <p:cNvPr id="2" name="Text 0"/>
+          <p:cNvSpPr/>
+          <p:nvPr/>
+        </p:nvSpPr>
+        <p:spPr>
+          <a:xfrm>
+            <a:off x="0" y="0"/>
+            <a:ext cx="9144000" cy="101501"/>
+          </a:xfrm>
+          <a:prstGeom prst="rect">
+            <a:avLst/>
+          </a:prstGeom>
+          <a:solidFill>
+            <a:srgbClr val="5D1D2E"/>
+          </a:solidFill>
+          <a:ln/>
+        </p:spPr>
+        <p:txBody>
+          <a:bodyPr wrap="square" rtlCol="0" anchor="ctr"/>
+          <a:lstStyle/>
+          <a:p>
+            <a:pPr indent="0" marL="0">
+              <a:buNone/>
+            </a:pPr>
+            <a:endParaRPr lang="en-US" dirty="0"/>
+          </a:p>
+        </p:txBody>
+      </p:sp>
+      <p:sp>
+        <p:nvSpPr>
+          <p:cNvPr id="3" name="Text 1"/>
+          <p:cNvSpPr/>
+          <p:nvPr/>
+        </p:nvSpPr>
+        <p:spPr>
+          <a:xfrm>
+            <a:off x="406301" y="457051"/>
+            <a:ext cx="8498026" cy="274290"/>
+          </a:xfrm>
+          <a:prstGeom prst="rect">
+            <a:avLst/>
+          </a:prstGeom>
+          <a:noFill/>
+          <a:ln/>
+        </p:spPr>
+        <p:txBody>
+          <a:bodyPr wrap="square" lIns="0" tIns="0" rIns="0" bIns="0" rtlCol="0" anchor="t"/>
+          <a:lstStyle/>
+          <a:p>
+            <a:pPr algn="l" indent="0" marL="0">
+              <a:lnSpc>
+                <a:spcPts val="2160"/>
+              </a:lnSpc>
+              <a:spcBef>
+                <a:spcPts val="600"/>
+              </a:spcBef>
+              <a:spcAft>
+                <a:spcPts val="800"/>
+              </a:spcAft>
+              <a:buNone/>
+            </a:pPr>
+            <a:r>
+              <a:rPr lang="en-US" sz="1800" b="1" dirty="0">
+                <a:solidFill>
+                  <a:srgbClr val="997929"/>
+                </a:solidFill>
+                <a:latin typeface="Times New Roman" pitchFamily="34" charset="0"/>
+                <a:ea typeface="Times New Roman" pitchFamily="34" charset="-122"/>
+                <a:cs typeface="Times New Roman" pitchFamily="34" charset="-120"/>
+              </a:rPr>
+              <a:t>Teacher notes</a:t>
+            </a:r>
+            <a:endParaRPr lang="en-US" sz="1800" dirty="0"/>
+          </a:p>
+        </p:txBody>
+      </p:sp>
+      <p:sp>
+        <p:nvSpPr>
+          <p:cNvPr id="4" name="Text 2"/>
+          <p:cNvSpPr/>
+          <p:nvPr/>
+        </p:nvSpPr>
+        <p:spPr>
+          <a:xfrm>
+            <a:off x="634901" y="883593"/>
+            <a:ext cx="8102798" cy="525661"/>
+          </a:xfrm>
+          <a:prstGeom prst="rect">
+            <a:avLst/>
+          </a:prstGeom>
+          <a:noFill/>
+          <a:ln/>
+        </p:spPr>
+        <p:txBody>
+          <a:bodyPr wrap="square" lIns="0" tIns="0" rIns="0" bIns="0" rtlCol="0" anchor="t"/>
+          <a:lstStyle/>
+          <a:p>
+            <a:pPr algn="l" marL="342900" indent="-342900">
+              <a:lnSpc>
+                <a:spcPts val="1620"/>
+              </a:lnSpc>
+              <a:spcAft>
+                <a:spcPts val="300"/>
+              </a:spcAft>
+              <a:buSzPct val="100000"/>
+              <a:buChar char="•"/>
+            </a:pPr>
+            <a:r>
+              <a:rPr lang="en-US" sz="1200" dirty="0">
+                <a:solidFill>
+                  <a:srgbClr val="1A1A1A"/>
+                </a:solidFill>
+                <a:latin typeface="Georgia" pitchFamily="34" charset="0"/>
+                <a:ea typeface="Georgia" pitchFamily="34" charset="-122"/>
+                <a:cs typeface="Georgia" pitchFamily="34" charset="-120"/>
+              </a:rPr>
+              <a:t>This is the most politically charged session. Honour the discomfort.</a:t>
+            </a:r>
+            <a:endParaRPr lang="en-US" sz="1200" dirty="0"/>
+          </a:p>
+          <a:p>
+            <a:pPr algn="l" marL="342900" indent="-342900">
+              <a:lnSpc>
+                <a:spcPts val="1620"/>
+              </a:lnSpc>
+              <a:spcAft>
+                <a:spcPts val="300"/>
+              </a:spcAft>
+              <a:buSzPct val="100000"/>
+              <a:buChar char="•"/>
+            </a:pPr>
+            <a:r>
+              <a:rPr lang="en-US" sz="1200" dirty="0">
+                <a:solidFill>
+                  <a:srgbClr val="1A1A1A"/>
+                </a:solidFill>
+                <a:latin typeface="Georgia" pitchFamily="34" charset="0"/>
+                <a:ea typeface="Georgia" pitchFamily="34" charset="-122"/>
+                <a:cs typeface="Georgia" pitchFamily="34" charset="-120"/>
+              </a:rPr>
+              <a:t>The honest framing: each position has a strongest version. The skill is articulating all three.</a:t>
+            </a:r>
+            <a:endParaRPr lang="en-US" sz="1200" dirty="0"/>
+          </a:p>
+        </p:txBody>
+      </p:sp>
+      <p:sp>
+        <p:nvSpPr>
+          <p:cNvPr id="5" name="Text 3"/>
+          <p:cNvSpPr/>
+          <p:nvPr/>
+        </p:nvSpPr>
+        <p:spPr>
+          <a:xfrm>
+            <a:off x="406301" y="4434929"/>
+            <a:ext cx="8498026" cy="213271"/>
+          </a:xfrm>
+          <a:prstGeom prst="rect">
+            <a:avLst/>
+          </a:prstGeom>
+          <a:noFill/>
+          <a:ln/>
+        </p:spPr>
+        <p:txBody>
+          <a:bodyPr wrap="square" lIns="0" tIns="0" rIns="0" bIns="0" rtlCol="0" anchor="t"/>
+          <a:lstStyle/>
+          <a:p>
+            <a:pPr algn="l" indent="0" marL="0">
+              <a:lnSpc>
+                <a:spcPts val="1680"/>
+              </a:lnSpc>
+              <a:spcBef>
+                <a:spcPts val="300"/>
+              </a:spcBef>
+              <a:spcAft>
+                <a:spcPts val="300"/>
+              </a:spcAft>
+              <a:buNone/>
+            </a:pPr>
+            <a:r>
+              <a:rPr lang="en-US" sz="1200" dirty="0">
+                <a:solidFill>
+                  <a:srgbClr val="1A1A1A"/>
+                </a:solidFill>
+                <a:latin typeface="Georgia" pitchFamily="34" charset="0"/>
+                <a:ea typeface="Georgia" pitchFamily="34" charset="-122"/>
+                <a:cs typeface="Georgia" pitchFamily="34" charset="-120"/>
+              </a:rPr>
+              <a:t>Senior ·  · IKS Curriculum</a:t>
+            </a:r>
+            <a:endParaRPr lang="en-US" sz="1200" dirty="0"/>
+          </a:p>
+        </p:txBody>
+      </p:sp>
+    </p:spTree>
+  </p:cSld>
+  <p:clrMapOvr>
+    <a:masterClrMapping/>
+  </p:clrMapOvr>
+</p:sld>
+</file>
+
+<file path=ppt/slides/slide13.xml><?xml version="1.0" encoding="utf-8"?>
+<p:sld xmlns:a="http://schemas.openxmlformats.org/drawingml/2006/main" xmlns:r="http://schemas.openxmlformats.org/officeDocument/2006/relationships" xmlns:p="http://schemas.openxmlformats.org/presentationml/2006/main">
+  <p:cSld name="Slide 13">
+    <p:bg>
+      <p:bgPr>
+        <a:solidFill>
+          <a:srgbClr val="FAF7F2"/>
+        </a:solidFill>
+      </p:bgPr>
+    </p:bg>
+    <p:spTree>
+      <p:nvGrpSpPr>
+        <p:cNvPr id="1" name=""/>
+        <p:cNvGrpSpPr/>
+        <p:nvPr/>
+      </p:nvGrpSpPr>
+      <p:grpSpPr>
+        <a:xfrm>
+          <a:off x="0" y="0"/>
+          <a:ext cx="0" cy="0"/>
+          <a:chOff x="0" y="0"/>
+          <a:chExt cx="0" cy="0"/>
+        </a:xfrm>
+      </p:grpSpPr>
+      <p:sp>
+        <p:nvSpPr>
+          <p:cNvPr id="2" name="Text 0"/>
+          <p:cNvSpPr/>
+          <p:nvPr/>
+        </p:nvSpPr>
+        <p:spPr>
+          <a:xfrm>
+            <a:off x="0" y="0"/>
+            <a:ext cx="9144000" cy="101501"/>
+          </a:xfrm>
+          <a:prstGeom prst="rect">
+            <a:avLst/>
+          </a:prstGeom>
+          <a:solidFill>
+            <a:srgbClr val="5D1D2E"/>
+          </a:solidFill>
+          <a:ln/>
+        </p:spPr>
+        <p:txBody>
+          <a:bodyPr wrap="square" rtlCol="0" anchor="ctr"/>
+          <a:lstStyle/>
+          <a:p>
+            <a:pPr indent="0" marL="0">
+              <a:buNone/>
+            </a:pPr>
+            <a:endParaRPr lang="en-US" dirty="0"/>
+          </a:p>
+        </p:txBody>
+      </p:sp>
+      <p:sp>
+        <p:nvSpPr>
+          <p:cNvPr id="3" name="Text 1"/>
+          <p:cNvSpPr/>
+          <p:nvPr/>
+        </p:nvSpPr>
+        <p:spPr>
+          <a:xfrm>
+            <a:off x="406301" y="457051"/>
+            <a:ext cx="8498026" cy="274290"/>
+          </a:xfrm>
+          <a:prstGeom prst="rect">
+            <a:avLst/>
+          </a:prstGeom>
+          <a:noFill/>
+          <a:ln/>
+        </p:spPr>
+        <p:txBody>
+          <a:bodyPr wrap="square" lIns="0" tIns="0" rIns="0" bIns="0" rtlCol="0" anchor="t"/>
+          <a:lstStyle/>
+          <a:p>
+            <a:pPr algn="l" indent="0" marL="0">
+              <a:lnSpc>
+                <a:spcPts val="2160"/>
+              </a:lnSpc>
+              <a:spcBef>
+                <a:spcPts val="600"/>
+              </a:spcBef>
+              <a:spcAft>
+                <a:spcPts val="800"/>
+              </a:spcAft>
+              <a:buNone/>
+            </a:pPr>
+            <a:r>
+              <a:rPr lang="en-US" sz="1800" b="1" dirty="0">
+                <a:solidFill>
+                  <a:srgbClr val="997929"/>
+                </a:solidFill>
+                <a:latin typeface="Times New Roman" pitchFamily="34" charset="0"/>
+                <a:ea typeface="Times New Roman" pitchFamily="34" charset="-122"/>
+                <a:cs typeface="Times New Roman" pitchFamily="34" charset="-120"/>
+              </a:rPr>
+              <a:t>Citation(s) used</a:t>
+            </a:r>
+            <a:endParaRPr lang="en-US" sz="1800" dirty="0"/>
+          </a:p>
+        </p:txBody>
+      </p:sp>
+      <p:sp>
+        <p:nvSpPr>
+          <p:cNvPr id="4" name="Text 2"/>
+          <p:cNvSpPr/>
+          <p:nvPr/>
+        </p:nvSpPr>
+        <p:spPr>
+          <a:xfrm>
+            <a:off x="634901" y="883593"/>
+            <a:ext cx="8102798" cy="769441"/>
+          </a:xfrm>
+          <a:prstGeom prst="rect">
+            <a:avLst/>
+          </a:prstGeom>
+          <a:noFill/>
+          <a:ln/>
+        </p:spPr>
+        <p:txBody>
+          <a:bodyPr wrap="square" lIns="0" tIns="0" rIns="0" bIns="0" rtlCol="0" anchor="t"/>
+          <a:lstStyle/>
+          <a:p>
+            <a:pPr algn="l" marL="342900" indent="-342900">
+              <a:lnSpc>
+                <a:spcPts val="1620"/>
+              </a:lnSpc>
+              <a:spcAft>
+                <a:spcPts val="300"/>
+              </a:spcAft>
+              <a:buSzPct val="100000"/>
+              <a:buChar char="•"/>
+            </a:pPr>
+            <a:r>
+              <a:rPr lang="en-US" sz="1200" dirty="0">
+                <a:solidFill>
+                  <a:srgbClr val="1A1A1A"/>
+                </a:solidFill>
+                <a:latin typeface="Georgia" pitchFamily="34" charset="0"/>
+                <a:ea typeface="Georgia" pitchFamily="34" charset="-122"/>
+                <a:cs typeface="Georgia" pitchFamily="34" charset="-120"/>
+              </a:rPr>
+              <a:t>NEP 2020 §4.6.</a:t>
+            </a:r>
+            <a:endParaRPr lang="en-US" sz="1200" dirty="0"/>
+          </a:p>
+          <a:p>
+            <a:pPr algn="l" marL="342900" indent="-342900">
+              <a:lnSpc>
+                <a:spcPts val="1620"/>
+              </a:lnSpc>
+              <a:spcAft>
+                <a:spcPts val="300"/>
+              </a:spcAft>
+              <a:buSzPct val="100000"/>
+              <a:buChar char="•"/>
+            </a:pPr>
+            <a:r>
+              <a:rPr lang="en-US" sz="1200" dirty="0">
+                <a:solidFill>
+                  <a:srgbClr val="1A1A1A"/>
+                </a:solidFill>
+                <a:latin typeface="Georgia" pitchFamily="34" charset="0"/>
+                <a:ea typeface="Georgia" pitchFamily="34" charset="-122"/>
+                <a:cs typeface="Georgia" pitchFamily="34" charset="-120"/>
+              </a:rPr>
+              <a:t>Thapar (2014).</a:t>
+            </a:r>
+            <a:endParaRPr lang="en-US" sz="1200" dirty="0"/>
+          </a:p>
+          <a:p>
+            <a:pPr algn="l" marL="342900" indent="-342900">
+              <a:lnSpc>
+                <a:spcPts val="1620"/>
+              </a:lnSpc>
+              <a:spcAft>
+                <a:spcPts val="300"/>
+              </a:spcAft>
+              <a:buSzPct val="100000"/>
+              <a:buChar char="•"/>
+            </a:pPr>
+            <a:r>
+              <a:rPr lang="en-US" sz="1200" dirty="0">
+                <a:solidFill>
+                  <a:srgbClr val="1A1A1A"/>
+                </a:solidFill>
+                <a:latin typeface="Georgia" pitchFamily="34" charset="0"/>
+                <a:ea typeface="Georgia" pitchFamily="34" charset="-122"/>
+                <a:cs typeface="Georgia" pitchFamily="34" charset="-120"/>
+              </a:rPr>
+              <a:t>Various Kapil Kapoor writings.</a:t>
             </a:r>
             <a:endParaRPr lang="en-US" sz="1200" dirty="0"/>
           </a:p>
@@ -2617,7 +3263,7 @@
                 <a:ea typeface="Times New Roman" pitchFamily="34" charset="-122"/>
                 <a:cs typeface="Times New Roman" pitchFamily="34" charset="-120"/>
               </a:rPr>
-              <a:t>Materials</a:t>
+              <a:t>Learning objective</a:t>
             </a:r>
             <a:endParaRPr lang="en-US" sz="1800" dirty="0"/>
           </a:p>
@@ -2665,7 +3311,7 @@
                 <a:ea typeface="Georgia" pitchFamily="34" charset="-122"/>
                 <a:cs typeface="Georgia" pitchFamily="34" charset="-120"/>
               </a:rPr>
-              <a:t>– NEP 2020 §4.6 printed extract – Whiteboard</a:t>
+              <a:t>Students articulate and defend a position on NEP 2020 §4.6 (IKS integration) with citation and counter-argument.</a:t>
             </a:r>
             <a:endParaRPr lang="en-US" sz="1200" dirty="0"/>
           </a:p>
@@ -2823,7 +3469,7 @@
                 <a:ea typeface="Times New Roman" pitchFamily="34" charset="-122"/>
                 <a:cs typeface="Times New Roman" pitchFamily="34" charset="-120"/>
               </a:rPr>
-              <a:t>Flow</a:t>
+              <a:t>Materials</a:t>
             </a:r>
             <a:endParaRPr lang="en-US" sz="1800" dirty="0"/>
           </a:p>
@@ -2832,6 +3478,76 @@
       <p:sp>
         <p:nvSpPr>
           <p:cNvPr id="4" name="Text 2"/>
+          <p:cNvSpPr/>
+          <p:nvPr/>
+        </p:nvSpPr>
+        <p:spPr>
+          <a:xfrm>
+            <a:off x="634901" y="883593"/>
+            <a:ext cx="8102798" cy="525661"/>
+          </a:xfrm>
+          <a:prstGeom prst="rect">
+            <a:avLst/>
+          </a:prstGeom>
+          <a:noFill/>
+          <a:ln/>
+        </p:spPr>
+        <p:txBody>
+          <a:bodyPr wrap="square" lIns="0" tIns="0" rIns="0" bIns="0" rtlCol="0" anchor="t"/>
+          <a:lstStyle/>
+          <a:p>
+            <a:pPr algn="l" marL="342900" indent="-342900">
+              <a:lnSpc>
+                <a:spcPts val="1620"/>
+              </a:lnSpc>
+              <a:spcAft>
+                <a:spcPts val="300"/>
+              </a:spcAft>
+              <a:buSzPct val="100000"/>
+              <a:buChar char="•"/>
+            </a:pPr>
+            <a:r>
+              <a:rPr lang="en-US" sz="1200" dirty="0">
+                <a:solidFill>
+                  <a:srgbClr val="1A1A1A"/>
+                </a:solidFill>
+                <a:latin typeface="Georgia" pitchFamily="34" charset="0"/>
+                <a:ea typeface="Georgia" pitchFamily="34" charset="-122"/>
+                <a:cs typeface="Georgia" pitchFamily="34" charset="-120"/>
+              </a:rPr>
+              <a:t>NEP 2020 §4.6 printed extract</a:t>
+            </a:r>
+            <a:endParaRPr lang="en-US" sz="1200" dirty="0"/>
+          </a:p>
+          <a:p>
+            <a:pPr algn="l" marL="342900" indent="-342900">
+              <a:lnSpc>
+                <a:spcPts val="1620"/>
+              </a:lnSpc>
+              <a:spcAft>
+                <a:spcPts val="300"/>
+              </a:spcAft>
+              <a:buSzPct val="100000"/>
+              <a:buChar char="•"/>
+            </a:pPr>
+            <a:r>
+              <a:rPr lang="en-US" sz="1200" dirty="0">
+                <a:solidFill>
+                  <a:srgbClr val="1A1A1A"/>
+                </a:solidFill>
+                <a:latin typeface="Georgia" pitchFamily="34" charset="0"/>
+                <a:ea typeface="Georgia" pitchFamily="34" charset="-122"/>
+                <a:cs typeface="Georgia" pitchFamily="34" charset="-120"/>
+              </a:rPr>
+              <a:t>Whiteboard</a:t>
+            </a:r>
+            <a:endParaRPr lang="en-US" sz="1200" dirty="0"/>
+          </a:p>
+        </p:txBody>
+      </p:sp>
+      <p:sp>
+        <p:nvSpPr>
+          <p:cNvPr id="5" name="Text 3"/>
           <p:cNvSpPr/>
           <p:nvPr/>
         </p:nvSpPr>
@@ -2981,7 +3697,7 @@
                 <a:ea typeface="Times New Roman" pitchFamily="34" charset="-122"/>
                 <a:cs typeface="Times New Roman" pitchFamily="34" charset="-120"/>
               </a:rPr>
-              <a:t>Warm-up (3 min)</a:t>
+              <a:t>Flow</a:t>
             </a:r>
             <a:endParaRPr lang="en-US" sz="1800" dirty="0"/>
           </a:p>
@@ -2990,54 +3706,6 @@
       <p:sp>
         <p:nvSpPr>
           <p:cNvPr id="4" name="Text 2"/>
-          <p:cNvSpPr/>
-          <p:nvPr/>
-        </p:nvSpPr>
-        <p:spPr>
-          <a:xfrm>
-            <a:off x="406301" y="870942"/>
-            <a:ext cx="8498026" cy="213271"/>
-          </a:xfrm>
-          <a:prstGeom prst="rect">
-            <a:avLst/>
-          </a:prstGeom>
-          <a:noFill/>
-          <a:ln/>
-        </p:spPr>
-        <p:txBody>
-          <a:bodyPr wrap="square" lIns="0" tIns="0" rIns="0" bIns="0" rtlCol="0" anchor="t"/>
-          <a:lstStyle/>
-          <a:p>
-            <a:pPr algn="l" indent="0" marL="0">
-              <a:lnSpc>
-                <a:spcPts val="1680"/>
-              </a:lnSpc>
-              <a:spcBef>
-                <a:spcPts val="300"/>
-              </a:spcBef>
-              <a:spcAft>
-                <a:spcPts val="300"/>
-              </a:spcAft>
-              <a:buNone/>
-            </a:pPr>
-            <a:r>
-              <a:rPr lang="en-US" sz="1200" dirty="0">
-                <a:solidFill>
-                  <a:srgbClr val="1A1A1A"/>
-                </a:solidFill>
-                <a:latin typeface="Georgia" pitchFamily="34" charset="0"/>
-                <a:ea typeface="Georgia" pitchFamily="34" charset="-122"/>
-                <a:cs typeface="Georgia" pitchFamily="34" charset="-120"/>
-              </a:rPr>
-              <a:t>Brief framing: today is structured debate. Three positions on the table.</a:t>
-            </a:r>
-            <a:endParaRPr lang="en-US" sz="1200" dirty="0"/>
-          </a:p>
-        </p:txBody>
-      </p:sp>
-      <p:sp>
-        <p:nvSpPr>
-          <p:cNvPr id="5" name="Text 3"/>
           <p:cNvSpPr/>
           <p:nvPr/>
         </p:nvSpPr>
@@ -3187,7 +3855,7 @@
                 <a:ea typeface="Times New Roman" pitchFamily="34" charset="-122"/>
                 <a:cs typeface="Times New Roman" pitchFamily="34" charset="-120"/>
               </a:rPr>
-              <a:t>Three positions (5 min)</a:t>
+              <a:t>Warm-up (3 min)</a:t>
             </a:r>
             <a:endParaRPr lang="en-US" sz="1800" dirty="0"/>
           </a:p>
@@ -3227,7 +3895,7 @@
               <a:buNone/>
             </a:pPr>
             <a:r>
-              <a:rPr lang="en-US" sz="1200" i="1" dirty="0">
+              <a:rPr lang="en-US" sz="1200" dirty="0">
                 <a:solidFill>
                   <a:srgbClr val="1A1A1A"/>
                 </a:solidFill>
@@ -3235,7 +3903,7 @@
                 <a:ea typeface="Georgia" pitchFamily="34" charset="-122"/>
                 <a:cs typeface="Georgia" pitchFamily="34" charset="-120"/>
               </a:rPr>
-              <a:t>Each row: Position · One-line claim · Scholarly defender (typical).</a:t>
+              <a:t>Brief framing: today is structured debate. Three positions on the table.</a:t>
             </a:r>
             <a:endParaRPr lang="en-US" sz="1200" dirty="0"/>
           </a:p>
@@ -3244,160 +3912,6 @@
       <p:sp>
         <p:nvSpPr>
           <p:cNvPr id="5" name="Text 3"/>
-          <p:cNvSpPr/>
-          <p:nvPr/>
-        </p:nvSpPr>
-        <p:spPr>
-          <a:xfrm>
-            <a:off x="634901" y="1173063"/>
-            <a:ext cx="8102798" cy="1386483"/>
-          </a:xfrm>
-          <a:prstGeom prst="rect">
-            <a:avLst/>
-          </a:prstGeom>
-          <a:noFill/>
-          <a:ln/>
-        </p:spPr>
-        <p:txBody>
-          <a:bodyPr wrap="square" lIns="0" tIns="0" rIns="0" bIns="0" rtlCol="0" anchor="t"/>
-          <a:lstStyle/>
-          <a:p>
-            <a:pPr algn="l" marL="342900" indent="-342900">
-              <a:lnSpc>
-                <a:spcPts val="1620"/>
-              </a:lnSpc>
-              <a:spcAft>
-                <a:spcPts val="300"/>
-              </a:spcAft>
-              <a:buSzPct val="100000"/>
-              <a:buChar char="•"/>
-            </a:pPr>
-            <a:r>
-              <a:rPr lang="en-US" sz="1200" b="1" dirty="0">
-                <a:solidFill>
-                  <a:srgbClr val="1A1A1A"/>
-                </a:solidFill>
-                <a:latin typeface="Georgia" pitchFamily="34" charset="0"/>
-                <a:ea typeface="Georgia" pitchFamily="34" charset="-122"/>
-                <a:cs typeface="Georgia" pitchFamily="34" charset="-120"/>
-              </a:rPr>
-              <a:t>A — Integration</a:t>
-            </a:r>
-            <a:pPr algn="l" indent="0" marL="0">
-              <a:lnSpc>
-                <a:spcPts val="1620"/>
-              </a:lnSpc>
-              <a:spcAft>
-                <a:spcPts val="300"/>
-              </a:spcAft>
-              <a:buNone/>
-            </a:pPr>
-            <a:r>
-              <a:rPr lang="en-US" sz="1200" dirty="0">
-                <a:solidFill>
-                  <a:srgbClr val="1A1A1A"/>
-                </a:solidFill>
-                <a:latin typeface="Georgia" pitchFamily="34" charset="0"/>
-                <a:ea typeface="Georgia" pitchFamily="34" charset="-122"/>
-                <a:cs typeface="Georgia" pitchFamily="34" charset="-120"/>
-              </a:rPr>
-              <a:t> — IKS should be taught alongside modern science in mainstream curriculum. · Kapil Kapoor; some NEP authors</a:t>
-            </a:r>
-            <a:endParaRPr lang="en-US" sz="1200" dirty="0"/>
-          </a:p>
-          <a:p>
-            <a:pPr algn="l" marL="342900" indent="-342900">
-              <a:lnSpc>
-                <a:spcPts val="1620"/>
-              </a:lnSpc>
-              <a:spcAft>
-                <a:spcPts val="300"/>
-              </a:spcAft>
-              <a:buSzPct val="100000"/>
-              <a:buChar char="•"/>
-            </a:pPr>
-            <a:r>
-              <a:rPr lang="en-US" sz="1200" b="1" dirty="0">
-                <a:solidFill>
-                  <a:srgbClr val="1A1A1A"/>
-                </a:solidFill>
-                <a:latin typeface="Georgia" pitchFamily="34" charset="0"/>
-                <a:ea typeface="Georgia" pitchFamily="34" charset="-122"/>
-                <a:cs typeface="Georgia" pitchFamily="34" charset="-120"/>
-              </a:rPr>
-              <a:t>B — Separation</a:t>
-            </a:r>
-            <a:pPr algn="l" indent="0" marL="0">
-              <a:lnSpc>
-                <a:spcPts val="1620"/>
-              </a:lnSpc>
-              <a:spcAft>
-                <a:spcPts val="300"/>
-              </a:spcAft>
-              <a:buNone/>
-            </a:pPr>
-            <a:r>
-              <a:rPr lang="en-US" sz="1200" dirty="0">
-                <a:solidFill>
-                  <a:srgbClr val="1A1A1A"/>
-                </a:solidFill>
-                <a:latin typeface="Georgia" pitchFamily="34" charset="0"/>
-                <a:ea typeface="Georgia" pitchFamily="34" charset="-122"/>
-                <a:cs typeface="Georgia" pitchFamily="34" charset="-120"/>
-              </a:rPr>
-              <a:t> — IKS belongs in humanities/history class; modern science class should focus on the scientific method. · Romila Thapar; Ramachandra Guha (broadly)</a:t>
-            </a:r>
-            <a:endParaRPr lang="en-US" sz="1200" dirty="0"/>
-          </a:p>
-          <a:p>
-            <a:pPr algn="l" marL="342900" indent="-342900">
-              <a:lnSpc>
-                <a:spcPts val="1620"/>
-              </a:lnSpc>
-              <a:spcAft>
-                <a:spcPts val="300"/>
-              </a:spcAft>
-              <a:buSzPct val="100000"/>
-              <a:buChar char="•"/>
-            </a:pPr>
-            <a:r>
-              <a:rPr lang="en-US" sz="1200" b="1" dirty="0">
-                <a:solidFill>
-                  <a:srgbClr val="1A1A1A"/>
-                </a:solidFill>
-                <a:latin typeface="Georgia" pitchFamily="34" charset="0"/>
-                <a:ea typeface="Georgia" pitchFamily="34" charset="-122"/>
-                <a:cs typeface="Georgia" pitchFamily="34" charset="-120"/>
-              </a:rPr>
-              <a:t>C — Qualified integration</a:t>
-            </a:r>
-            <a:pPr algn="l" indent="0" marL="0">
-              <a:lnSpc>
-                <a:spcPts val="1620"/>
-              </a:lnSpc>
-              <a:spcAft>
-                <a:spcPts val="300"/>
-              </a:spcAft>
-              <a:buNone/>
-            </a:pPr>
-            <a:r>
-              <a:rPr lang="en-US" sz="1200" dirty="0">
-                <a:solidFill>
-                  <a:srgbClr val="1A1A1A"/>
-                </a:solidFill>
-                <a:latin typeface="Georgia" pitchFamily="34" charset="0"/>
-                <a:ea typeface="Georgia" pitchFamily="34" charset="-122"/>
-                <a:cs typeface="Georgia" pitchFamily="34" charset="-120"/>
-              </a:rPr>
-              <a:t> — Historical context yes; equivalent scientific validity no. · Manjul Bhargava–style "math is universal"</a:t>
-            </a:r>
-            <a:endParaRPr lang="en-US" sz="1200" dirty="0"/>
-          </a:p>
-        </p:txBody>
-      </p:sp>
-      <p:sp>
-        <p:nvSpPr>
-          <p:cNvPr id="6" name="Text 4"/>
           <p:cNvSpPr/>
           <p:nvPr/>
         </p:nvSpPr>
@@ -3547,7 +4061,7 @@
                 <a:ea typeface="Times New Roman" pitchFamily="34" charset="-122"/>
                 <a:cs typeface="Times New Roman" pitchFamily="34" charset="-120"/>
               </a:rPr>
-              <a:t>Debate (25 min)</a:t>
+              <a:t>Three positions (5 min)</a:t>
             </a:r>
             <a:endParaRPr lang="en-US" sz="1800" dirty="0"/>
           </a:p>
@@ -3562,7 +4076,7 @@
         <p:spPr>
           <a:xfrm>
             <a:off x="406301" y="870942"/>
-            <a:ext cx="8498026" cy="426541"/>
+            <a:ext cx="8498026" cy="213271"/>
           </a:xfrm>
           <a:prstGeom prst="rect">
             <a:avLst/>
@@ -3587,7 +4101,7 @@
               <a:buNone/>
             </a:pPr>
             <a:r>
-              <a:rPr lang="en-US" sz="1200" dirty="0">
+              <a:rPr lang="en-US" sz="1200" i="1" dirty="0">
                 <a:solidFill>
                   <a:srgbClr val="1A1A1A"/>
                 </a:solidFill>
@@ -3595,7 +4109,7 @@
                 <a:ea typeface="Georgia" pitchFamily="34" charset="-122"/>
                 <a:cs typeface="Georgia" pitchFamily="34" charset="-120"/>
               </a:rPr>
-              <a:t>– 5 min: groups by position (self-select; balance). – 8 min: group prep — 2 strongest arguments + 1 steel-manned counter to each of the other two. – 10 min: structured debate (3 min per group + 1 min cross). – 2 min: closing.</a:t>
+              <a:t>Each row: Position · One-line claim · Scholarly defender (typical).</a:t>
             </a:r>
             <a:endParaRPr lang="en-US" sz="1200" dirty="0"/>
           </a:p>
@@ -3753,7 +4267,7 @@
                 <a:ea typeface="Times New Roman" pitchFamily="34" charset="-122"/>
                 <a:cs typeface="Times New Roman" pitchFamily="34" charset="-120"/>
               </a:rPr>
-              <a:t>Oral assessment (during)</a:t>
+              <a:t>Three positions (5 min) (cont.)</a:t>
             </a:r>
             <a:endParaRPr lang="en-US" sz="1800" dirty="0"/>
           </a:p>
@@ -3767,8 +4281,8 @@
         </p:nvSpPr>
         <p:spPr>
           <a:xfrm>
-            <a:off x="406301" y="870942"/>
-            <a:ext cx="8498026" cy="213271"/>
+            <a:off x="634901" y="883593"/>
+            <a:ext cx="8102798" cy="1386483"/>
           </a:xfrm>
           <a:prstGeom prst="rect">
             <a:avLst/>
@@ -3780,20 +4294,18 @@
           <a:bodyPr wrap="square" lIns="0" tIns="0" rIns="0" bIns="0" rtlCol="0" anchor="t"/>
           <a:lstStyle/>
           <a:p>
-            <a:pPr algn="l" indent="0" marL="0">
-              <a:lnSpc>
-                <a:spcPts val="1680"/>
-              </a:lnSpc>
-              <a:spcBef>
-                <a:spcPts val="300"/>
-              </a:spcBef>
-              <a:spcAft>
-                <a:spcPts val="300"/>
-              </a:spcAft>
-              <a:buNone/>
-            </a:pPr>
-            <a:r>
-              <a:rPr lang="en-US" sz="1200" dirty="0">
+            <a:pPr algn="l" marL="342900" indent="-342900">
+              <a:lnSpc>
+                <a:spcPts val="1620"/>
+              </a:lnSpc>
+              <a:spcAft>
+                <a:spcPts val="300"/>
+              </a:spcAft>
+              <a:buSzPct val="100000"/>
+              <a:buChar char="•"/>
+            </a:pPr>
+            <a:r>
+              <a:rPr lang="en-US" sz="1200" b="1" dirty="0">
                 <a:solidFill>
                   <a:srgbClr val="1A1A1A"/>
                 </a:solidFill>
@@ -3801,7 +4313,115 @@
                 <a:ea typeface="Georgia" pitchFamily="34" charset="-122"/>
                 <a:cs typeface="Georgia" pitchFamily="34" charset="-120"/>
               </a:rPr>
-              <a:t>Teacher scores 5 random students on: position clarity, evidence use, counter-argument steel-manning, listening.</a:t>
+              <a:t>A — Integration</a:t>
+            </a:r>
+            <a:pPr algn="l" indent="0" marL="0">
+              <a:lnSpc>
+                <a:spcPts val="1620"/>
+              </a:lnSpc>
+              <a:spcAft>
+                <a:spcPts val="300"/>
+              </a:spcAft>
+              <a:buNone/>
+            </a:pPr>
+            <a:r>
+              <a:rPr lang="en-US" sz="1200" dirty="0">
+                <a:solidFill>
+                  <a:srgbClr val="1A1A1A"/>
+                </a:solidFill>
+                <a:latin typeface="Georgia" pitchFamily="34" charset="0"/>
+                <a:ea typeface="Georgia" pitchFamily="34" charset="-122"/>
+                <a:cs typeface="Georgia" pitchFamily="34" charset="-120"/>
+              </a:rPr>
+              <a:t> — IKS should be taught alongside modern science in mainstream curriculum. · Kapil Kapoor; some NEP authors</a:t>
+            </a:r>
+            <a:endParaRPr lang="en-US" sz="1200" dirty="0"/>
+          </a:p>
+          <a:p>
+            <a:pPr algn="l" marL="342900" indent="-342900">
+              <a:lnSpc>
+                <a:spcPts val="1620"/>
+              </a:lnSpc>
+              <a:spcAft>
+                <a:spcPts val="300"/>
+              </a:spcAft>
+              <a:buSzPct val="100000"/>
+              <a:buChar char="•"/>
+            </a:pPr>
+            <a:r>
+              <a:rPr lang="en-US" sz="1200" b="1" dirty="0">
+                <a:solidFill>
+                  <a:srgbClr val="1A1A1A"/>
+                </a:solidFill>
+                <a:latin typeface="Georgia" pitchFamily="34" charset="0"/>
+                <a:ea typeface="Georgia" pitchFamily="34" charset="-122"/>
+                <a:cs typeface="Georgia" pitchFamily="34" charset="-120"/>
+              </a:rPr>
+              <a:t>B — Separation</a:t>
+            </a:r>
+            <a:pPr algn="l" indent="0" marL="0">
+              <a:lnSpc>
+                <a:spcPts val="1620"/>
+              </a:lnSpc>
+              <a:spcAft>
+                <a:spcPts val="300"/>
+              </a:spcAft>
+              <a:buNone/>
+            </a:pPr>
+            <a:r>
+              <a:rPr lang="en-US" sz="1200" dirty="0">
+                <a:solidFill>
+                  <a:srgbClr val="1A1A1A"/>
+                </a:solidFill>
+                <a:latin typeface="Georgia" pitchFamily="34" charset="0"/>
+                <a:ea typeface="Georgia" pitchFamily="34" charset="-122"/>
+                <a:cs typeface="Georgia" pitchFamily="34" charset="-120"/>
+              </a:rPr>
+              <a:t> — IKS belongs in humanities/history class; modern science class should focus on the scientific method. · Romila Thapar; Ramachandra Guha (broadly)</a:t>
+            </a:r>
+            <a:endParaRPr lang="en-US" sz="1200" dirty="0"/>
+          </a:p>
+          <a:p>
+            <a:pPr algn="l" marL="342900" indent="-342900">
+              <a:lnSpc>
+                <a:spcPts val="1620"/>
+              </a:lnSpc>
+              <a:spcAft>
+                <a:spcPts val="300"/>
+              </a:spcAft>
+              <a:buSzPct val="100000"/>
+              <a:buChar char="•"/>
+            </a:pPr>
+            <a:r>
+              <a:rPr lang="en-US" sz="1200" b="1" dirty="0">
+                <a:solidFill>
+                  <a:srgbClr val="1A1A1A"/>
+                </a:solidFill>
+                <a:latin typeface="Georgia" pitchFamily="34" charset="0"/>
+                <a:ea typeface="Georgia" pitchFamily="34" charset="-122"/>
+                <a:cs typeface="Georgia" pitchFamily="34" charset="-120"/>
+              </a:rPr>
+              <a:t>C — Qualified integration</a:t>
+            </a:r>
+            <a:pPr algn="l" indent="0" marL="0">
+              <a:lnSpc>
+                <a:spcPts val="1620"/>
+              </a:lnSpc>
+              <a:spcAft>
+                <a:spcPts val="300"/>
+              </a:spcAft>
+              <a:buNone/>
+            </a:pPr>
+            <a:r>
+              <a:rPr lang="en-US" sz="1200" dirty="0">
+                <a:solidFill>
+                  <a:srgbClr val="1A1A1A"/>
+                </a:solidFill>
+                <a:latin typeface="Georgia" pitchFamily="34" charset="0"/>
+                <a:ea typeface="Georgia" pitchFamily="34" charset="-122"/>
+                <a:cs typeface="Georgia" pitchFamily="34" charset="-120"/>
+              </a:rPr>
+              <a:t> — Historical context yes; equivalent scientific validity no. · Manjul Bhargava–style "math is universal"</a:t>
             </a:r>
             <a:endParaRPr lang="en-US" sz="1200" dirty="0"/>
           </a:p>
@@ -3959,7 +4579,7 @@
                 <a:ea typeface="Times New Roman" pitchFamily="34" charset="-122"/>
                 <a:cs typeface="Times New Roman" pitchFamily="34" charset="-120"/>
               </a:rPr>
-              <a:t>Wrap-up (12 min)</a:t>
+              <a:t>Debate (25 min)</a:t>
             </a:r>
             <a:endParaRPr lang="en-US" sz="1800" dirty="0"/>
           </a:p>
@@ -3973,8 +4593,8 @@
         </p:nvSpPr>
         <p:spPr>
           <a:xfrm>
-            <a:off x="406301" y="870942"/>
-            <a:ext cx="8498026" cy="213271"/>
+            <a:off x="634901" y="883593"/>
+            <a:ext cx="8102798" cy="1013222"/>
           </a:xfrm>
           <a:prstGeom prst="rect">
             <a:avLst/>
@@ -3986,17 +4606,15 @@
           <a:bodyPr wrap="square" lIns="0" tIns="0" rIns="0" bIns="0" rtlCol="0" anchor="t"/>
           <a:lstStyle/>
           <a:p>
-            <a:pPr algn="l" indent="0" marL="0">
-              <a:lnSpc>
-                <a:spcPts val="1680"/>
-              </a:lnSpc>
-              <a:spcBef>
-                <a:spcPts val="300"/>
-              </a:spcBef>
-              <a:spcAft>
-                <a:spcPts val="300"/>
-              </a:spcAft>
-              <a:buNone/>
+            <a:pPr algn="l" marL="342900" indent="-342900">
+              <a:lnSpc>
+                <a:spcPts val="1620"/>
+              </a:lnSpc>
+              <a:spcAft>
+                <a:spcPts val="300"/>
+              </a:spcAft>
+              <a:buSzPct val="100000"/>
+              <a:buChar char="•"/>
             </a:pPr>
             <a:r>
               <a:rPr lang="en-US" sz="1200" dirty="0">
@@ -4007,32 +4625,10 @@
                 <a:ea typeface="Georgia" pitchFamily="34" charset="-122"/>
                 <a:cs typeface="Georgia" pitchFamily="34" charset="-120"/>
               </a:rPr>
-              <a:t>– 3 students share if their view shifted.</a:t>
+              <a:t>5 min: groups by position (self-select; balance).</a:t>
             </a:r>
             <a:endParaRPr lang="en-US" sz="1200" dirty="0"/>
           </a:p>
-        </p:txBody>
-      </p:sp>
-      <p:sp>
-        <p:nvSpPr>
-          <p:cNvPr id="5" name="Text 3"/>
-          <p:cNvSpPr/>
-          <p:nvPr/>
-        </p:nvSpPr>
-        <p:spPr>
-          <a:xfrm>
-            <a:off x="634901" y="1173063"/>
-            <a:ext cx="8102798" cy="487561"/>
-          </a:xfrm>
-          <a:prstGeom prst="rect">
-            <a:avLst/>
-          </a:prstGeom>
-          <a:noFill/>
-          <a:ln/>
-        </p:spPr>
-        <p:txBody>
-          <a:bodyPr wrap="square" lIns="0" tIns="0" rIns="0" bIns="0" rtlCol="0" anchor="t"/>
-          <a:lstStyle/>
           <a:p>
             <a:pPr algn="l" marL="342900" indent="-342900">
               <a:lnSpc>
@@ -4045,7 +4641,7 @@
               <a:buChar char="•"/>
             </a:pPr>
             <a:r>
-              <a:rPr lang="en-US" sz="1200" i="1" dirty="0">
+              <a:rPr lang="en-US" sz="1200" dirty="0">
                 <a:solidFill>
                   <a:srgbClr val="1A1A1A"/>
                 </a:solidFill>
@@ -4053,15 +4649,63 @@
                 <a:ea typeface="Georgia" pitchFamily="34" charset="-122"/>
                 <a:cs typeface="Georgia" pitchFamily="34" charset="-120"/>
               </a:rPr>
-              <a:t>"You don't have to commit tonight. Your paper position can be different from your debate position. That's intellectually honest."</a:t>
+              <a:t>8 min: group prep — 2 strongest arguments + 1 steel-manned counter to each of the other two.</a:t>
             </a:r>
             <a:endParaRPr lang="en-US" sz="1200" dirty="0"/>
           </a:p>
-        </p:txBody>
-      </p:sp>
-      <p:sp>
-        <p:nvSpPr>
-          <p:cNvPr id="6" name="Text 4"/>
+          <a:p>
+            <a:pPr algn="l" marL="342900" indent="-342900">
+              <a:lnSpc>
+                <a:spcPts val="1620"/>
+              </a:lnSpc>
+              <a:spcAft>
+                <a:spcPts val="300"/>
+              </a:spcAft>
+              <a:buSzPct val="100000"/>
+              <a:buChar char="•"/>
+            </a:pPr>
+            <a:r>
+              <a:rPr lang="en-US" sz="1200" dirty="0">
+                <a:solidFill>
+                  <a:srgbClr val="1A1A1A"/>
+                </a:solidFill>
+                <a:latin typeface="Georgia" pitchFamily="34" charset="0"/>
+                <a:ea typeface="Georgia" pitchFamily="34" charset="-122"/>
+                <a:cs typeface="Georgia" pitchFamily="34" charset="-120"/>
+              </a:rPr>
+              <a:t>10 min: structured debate (3 min per group + 1 min cross).</a:t>
+            </a:r>
+            <a:endParaRPr lang="en-US" sz="1200" dirty="0"/>
+          </a:p>
+          <a:p>
+            <a:pPr algn="l" marL="342900" indent="-342900">
+              <a:lnSpc>
+                <a:spcPts val="1620"/>
+              </a:lnSpc>
+              <a:spcAft>
+                <a:spcPts val="300"/>
+              </a:spcAft>
+              <a:buSzPct val="100000"/>
+              <a:buChar char="•"/>
+            </a:pPr>
+            <a:r>
+              <a:rPr lang="en-US" sz="1200" dirty="0">
+                <a:solidFill>
+                  <a:srgbClr val="1A1A1A"/>
+                </a:solidFill>
+                <a:latin typeface="Georgia" pitchFamily="34" charset="0"/>
+                <a:ea typeface="Georgia" pitchFamily="34" charset="-122"/>
+                <a:cs typeface="Georgia" pitchFamily="34" charset="-120"/>
+              </a:rPr>
+              <a:t>2 min: closing.</a:t>
+            </a:r>
+            <a:endParaRPr lang="en-US" sz="1200" dirty="0"/>
+          </a:p>
+        </p:txBody>
+      </p:sp>
+      <p:sp>
+        <p:nvSpPr>
+          <p:cNvPr id="5" name="Text 3"/>
           <p:cNvSpPr/>
           <p:nvPr/>
         </p:nvSpPr>
@@ -4211,7 +4855,7 @@
                 <a:ea typeface="Times New Roman" pitchFamily="34" charset="-122"/>
                 <a:cs typeface="Times New Roman" pitchFamily="34" charset="-120"/>
               </a:rPr>
-              <a:t>Differentiation</a:t>
+              <a:t>Oral assessment (during)</a:t>
             </a:r>
             <a:endParaRPr lang="en-US" sz="1800" dirty="0"/>
           </a:p>
@@ -4225,8 +4869,8 @@
         </p:nvSpPr>
         <p:spPr>
           <a:xfrm>
-            <a:off x="634901" y="883593"/>
-            <a:ext cx="8102798" cy="525661"/>
+            <a:off x="406301" y="870942"/>
+            <a:ext cx="8498026" cy="213271"/>
           </a:xfrm>
           <a:prstGeom prst="rect">
             <a:avLst/>
@@ -4238,18 +4882,20 @@
           <a:bodyPr wrap="square" lIns="0" tIns="0" rIns="0" bIns="0" rtlCol="0" anchor="t"/>
           <a:lstStyle/>
           <a:p>
-            <a:pPr algn="l" marL="342900" indent="-342900">
-              <a:lnSpc>
-                <a:spcPts val="1620"/>
-              </a:lnSpc>
-              <a:spcAft>
-                <a:spcPts val="300"/>
-              </a:spcAft>
-              <a:buSzPct val="100000"/>
-              <a:buChar char="•"/>
-            </a:pPr>
-            <a:r>
-              <a:rPr lang="en-US" sz="1200" b="1" dirty="0">
+            <a:pPr algn="l" indent="0" marL="0">
+              <a:lnSpc>
+                <a:spcPts val="1680"/>
+              </a:lnSpc>
+              <a:spcBef>
+                <a:spcPts val="300"/>
+              </a:spcBef>
+              <a:spcAft>
+                <a:spcPts val="300"/>
+              </a:spcAft>
+              <a:buNone/>
+            </a:pPr>
+            <a:r>
+              <a:rPr lang="en-US" sz="1200" dirty="0">
                 <a:solidFill>
                   <a:srgbClr val="1A1A1A"/>
                 </a:solidFill>
@@ -4257,71 +4903,7 @@
                 <a:ea typeface="Georgia" pitchFamily="34" charset="-122"/>
                 <a:cs typeface="Georgia" pitchFamily="34" charset="-120"/>
               </a:rPr>
-              <a:t>Tier up:</a:t>
-            </a:r>
-            <a:pPr algn="l" indent="0" marL="0">
-              <a:lnSpc>
-                <a:spcPts val="1620"/>
-              </a:lnSpc>
-              <a:spcAft>
-                <a:spcPts val="300"/>
-              </a:spcAft>
-              <a:buNone/>
-            </a:pPr>
-            <a:r>
-              <a:rPr lang="en-US" sz="1200" dirty="0">
-                <a:solidFill>
-                  <a:srgbClr val="1A1A1A"/>
-                </a:solidFill>
-                <a:latin typeface="Georgia" pitchFamily="34" charset="0"/>
-                <a:ea typeface="Georgia" pitchFamily="34" charset="-122"/>
-                <a:cs typeface="Georgia" pitchFamily="34" charset="-120"/>
-              </a:rPr>
-              <a:t> Take a position you DON'T hold. Hardest form of argument.</a:t>
-            </a:r>
-            <a:endParaRPr lang="en-US" sz="1200" dirty="0"/>
-          </a:p>
-          <a:p>
-            <a:pPr algn="l" marL="342900" indent="-342900">
-              <a:lnSpc>
-                <a:spcPts val="1620"/>
-              </a:lnSpc>
-              <a:spcAft>
-                <a:spcPts val="300"/>
-              </a:spcAft>
-              <a:buSzPct val="100000"/>
-              <a:buChar char="•"/>
-            </a:pPr>
-            <a:r>
-              <a:rPr lang="en-US" sz="1200" b="1" dirty="0">
-                <a:solidFill>
-                  <a:srgbClr val="1A1A1A"/>
-                </a:solidFill>
-                <a:latin typeface="Georgia" pitchFamily="34" charset="0"/>
-                <a:ea typeface="Georgia" pitchFamily="34" charset="-122"/>
-                <a:cs typeface="Georgia" pitchFamily="34" charset="-120"/>
-              </a:rPr>
-              <a:t>Tier down:</a:t>
-            </a:r>
-            <a:pPr algn="l" indent="0" marL="0">
-              <a:lnSpc>
-                <a:spcPts val="1620"/>
-              </a:lnSpc>
-              <a:spcAft>
-                <a:spcPts val="300"/>
-              </a:spcAft>
-              <a:buNone/>
-            </a:pPr>
-            <a:r>
-              <a:rPr lang="en-US" sz="1200" dirty="0">
-                <a:solidFill>
-                  <a:srgbClr val="1A1A1A"/>
-                </a:solidFill>
-                <a:latin typeface="Georgia" pitchFamily="34" charset="0"/>
-                <a:ea typeface="Georgia" pitchFamily="34" charset="-122"/>
-                <a:cs typeface="Georgia" pitchFamily="34" charset="-120"/>
-              </a:rPr>
-              <a:t> Use Day 5 reading response as your script.</a:t>
+              <a:t>Teacher scores 5 random students on: position clarity, evidence use, counter-argument steel-manning, listening.</a:t>
             </a:r>
             <a:endParaRPr lang="en-US" sz="1200" dirty="0"/>
           </a:p>
